--- a/classes/parte-15-seguridad-de-ia-y-machine-learning/295-owasp-top-10-para-aplicaciones-con-llm/clase-295-presentacion.pptx
+++ b/classes/parte-15-seguridad-de-ia-y-machine-learning/295-owasp-top-10-para-aplicaciones-con-llm/clase-295-presentacion.pptx
@@ -17,6 +17,10 @@
     <p:sldId id="265" r:id="rId16"/>
     <p:sldId id="266" r:id="rId17"/>
     <p:sldId id="267" r:id="rId18"/>
+    <p:sldId id="268" r:id="rId19"/>
+    <p:sldId id="269" r:id="rId20"/>
+    <p:sldId id="270" r:id="rId21"/>
+    <p:sldId id="271" r:id="rId22"/>
   </p:sldIdLst>
   <p:sldSz cx="9144000" cy="6858000" type="screen4x3"/>
   <p:notesSz cx="6858000" cy="9144000"/>
@@ -3198,7 +3202,7 @@
                   <a:srgbClr val="0B3D2E"/>
                 </a:solidFill>
               </a:rPr>
-              <a:t>⚠️ Errores comunes</a:t>
+              <a:t>🧪 Laboratorio guiado (auditoría aplicada)</a:t>
             </a:r>
           </a:p>
         </p:txBody>
@@ -3236,67 +3240,97 @@
                   <a:srgbClr val="22282E"/>
                 </a:solidFill>
               </a:rPr>
-              <a:t>•  "Solo me preocupa el prompt injection" — Reduce la superficie a un riesgo. Recorre los 10; output handling y agency son igual de graves.</a:t>
-            </a:r>
-          </a:p>
-          <a:p>
-            <a:pPr>
-              <a:spcAft>
-                <a:spcPts val="600"/>
-              </a:spcAft>
-            </a:pPr>
-            <a:r>
-              <a:rPr sz="1500">
-                <a:solidFill>
-                  <a:srgbClr val="22282E"/>
-                </a:solidFill>
-              </a:rPr>
-              <a:t>•  Confundir LLM01 y LLM02 — Injection es la entrada; output handling es qué haces con la salida. Son controles distintos.</a:t>
-            </a:r>
-          </a:p>
-          <a:p>
-            <a:pPr>
-              <a:spcAft>
-                <a:spcPts val="600"/>
-              </a:spcAft>
-            </a:pPr>
-            <a:r>
-              <a:rPr sz="1500">
-                <a:solidFill>
-                  <a:srgbClr val="22282E"/>
-                </a:solidFill>
-              </a:rPr>
-              <a:t>•  Ignorar la injection indirecta — Solo se filtra la entrada del usuario, no los documentos RAG. Trata todo contenido recuperado como no confiable.</a:t>
-            </a:r>
-          </a:p>
-          <a:p>
-            <a:pPr>
-              <a:spcAft>
-                <a:spcPts val="600"/>
-              </a:spcAft>
-            </a:pPr>
-            <a:r>
-              <a:rPr sz="1500">
-                <a:solidFill>
-                  <a:srgbClr val="22282E"/>
-                </a:solidFill>
-              </a:rPr>
-              <a:t>•  Dar al agente todos los permisos — Excessive Agency. Aplica mínimo privilegio y human-in-the-loop para acciones sensibles.</a:t>
-            </a:r>
-          </a:p>
-          <a:p>
-            <a:pPr>
-              <a:spcAft>
-                <a:spcPts val="600"/>
-              </a:spcAft>
-            </a:pPr>
-            <a:r>
-              <a:rPr sz="1500">
-                <a:solidFill>
-                  <a:srgbClr val="22282E"/>
-                </a:solidFill>
-              </a:rPr>
-              <a:t>•  Usar una versión desactualizada del Top 10 — Los IDs cambian entre 2023 y 2025. Cita la versión y verifica los códigos.</a:t>
+              <a:t>•  Ejercicio de análisis de arquitectura, no de explotación.</a:t>
+            </a:r>
+          </a:p>
+          <a:p>
+            <a:pPr>
+              <a:spcAft>
+                <a:spcPts val="600"/>
+              </a:spcAft>
+            </a:pPr>
+            <a:r>
+              <a:rPr sz="1500">
+                <a:solidFill>
+                  <a:srgbClr val="22282E"/>
+                </a:solidFill>
+              </a:rPr>
+              <a:t>•  Elige una app real de referencia. Ejemplo: "asistente de soporte que consulta una base de conocimiento (RAG) y puede crear tickets vía API".</a:t>
+            </a:r>
+          </a:p>
+          <a:p>
+            <a:pPr>
+              <a:spcAft>
+                <a:spcPts val="600"/>
+              </a:spcAft>
+            </a:pPr>
+            <a:r>
+              <a:rPr sz="1500">
+                <a:solidFill>
+                  <a:srgbClr val="22282E"/>
+                </a:solidFill>
+              </a:rPr>
+              <a:t>•  Dibuja el flujo de datos. Usuario → prompt → recuperación de documentos → LLM → salida → acciones (crear ticket). Marca cada frontera de confianza.</a:t>
+            </a:r>
+          </a:p>
+          <a:p>
+            <a:pPr>
+              <a:spcAft>
+                <a:spcPts val="600"/>
+              </a:spcAft>
+            </a:pPr>
+            <a:r>
+              <a:rPr sz="1500">
+                <a:solidFill>
+                  <a:srgbClr val="22282E"/>
+                </a:solidFill>
+              </a:rPr>
+              <a:t>•  Recorre el Top 10 riesgo por riesgo. Para cada uno, responde: ¿aplica a esta app? ¿dónde exactamente? ¿con qué impacto?</a:t>
+            </a:r>
+          </a:p>
+          <a:p>
+            <a:pPr>
+              <a:spcAft>
+                <a:spcPts val="600"/>
+              </a:spcAft>
+            </a:pPr>
+            <a:r>
+              <a:rPr sz="1500">
+                <a:solidFill>
+                  <a:srgbClr val="22282E"/>
+                </a:solidFill>
+              </a:rPr>
+              <a:t>•  Prompt injection (LLM01). Identifica dónde entra texto no confiable (mensaje del usuario y documentos recuperados). Marca ambos como fuentes de injection directa e indirecta.</a:t>
+            </a:r>
+          </a:p>
+          <a:p>
+            <a:pPr>
+              <a:spcAft>
+                <a:spcPts val="600"/>
+              </a:spcAft>
+            </a:pPr>
+            <a:r>
+              <a:rPr sz="1500">
+                <a:solidFill>
+                  <a:srgbClr val="22282E"/>
+                </a:solidFill>
+              </a:rPr>
+              <a:t>•  Output handling (LLM02). ¿La respuesta se renderiza en HTML? ¿Se pasa a otra herramienta? Define validación/escape necesarios.</a:t>
+            </a:r>
+          </a:p>
+          <a:p>
+            <a:pPr>
+              <a:spcAft>
+                <a:spcPts val="600"/>
+              </a:spcAft>
+            </a:pPr>
+            <a:r>
+              <a:rPr sz="1500">
+                <a:solidFill>
+                  <a:srgbClr val="22282E"/>
+                </a:solidFill>
+              </a:rPr>
+              <a:t>•  Excessive Agency (LLM08). Lista las herramientas del agente y sus permisos. Aplica mínimo privilegio: ¿crear ticket necesita aprobación humana?</a:t>
             </a:r>
           </a:p>
         </p:txBody>
@@ -3347,7 +3381,7 @@
                   <a:srgbClr val="0B3D2E"/>
                 </a:solidFill>
               </a:rPr>
-              <a:t>❓ Preguntas frecuentes</a:t>
+              <a:t>✍️ Ejercicios</a:t>
             </a:r>
           </a:p>
         </p:txBody>
@@ -3385,97 +3419,82 @@
                   <a:srgbClr val="22282E"/>
                 </a:solidFill>
               </a:rPr>
-              <a:t>•  ❓ ¿El OWASP Top 10 para LLM reemplaza al Top 10 web clásico?</a:t>
-            </a:r>
-          </a:p>
-          <a:p>
-            <a:pPr>
-              <a:spcAft>
-                <a:spcPts val="600"/>
-              </a:spcAft>
-            </a:pPr>
-            <a:r>
-              <a:rPr sz="1500">
-                <a:solidFill>
-                  <a:srgbClr val="22282E"/>
-                </a:solidFill>
-              </a:rPr>
-              <a:t>•  No. Lo complementa. Una app con LLM sigue siendo una app web con sus riesgos habituales; el Top 10 LLM añade los específicos del modelo.</a:t>
-            </a:r>
-          </a:p>
-          <a:p>
-            <a:pPr>
-              <a:spcAft>
-                <a:spcPts val="600"/>
-              </a:spcAft>
-            </a:pPr>
-            <a:r>
-              <a:rPr sz="1500">
-                <a:solidFill>
-                  <a:srgbClr val="22282E"/>
-                </a:solidFill>
-              </a:rPr>
-              <a:t>•  ❓ ¿Cuál es el riesgo más frecuente en la práctica?</a:t>
-            </a:r>
-          </a:p>
-          <a:p>
-            <a:pPr>
-              <a:spcAft>
-                <a:spcPts val="600"/>
-              </a:spcAft>
-            </a:pPr>
-            <a:r>
-              <a:rPr sz="1500">
-                <a:solidFill>
-                  <a:srgbClr val="22282E"/>
-                </a:solidFill>
-              </a:rPr>
-              <a:t>•  Prompt injection (LLM01) y mal manejo de salida (LLM02) dominan los hallazgos reales, sobre todo cuando el LLM alimenta otras acciones o se renderiza sin escape.</a:t>
-            </a:r>
-          </a:p>
-          <a:p>
-            <a:pPr>
-              <a:spcAft>
-                <a:spcPts val="600"/>
-              </a:spcAft>
-            </a:pPr>
-            <a:r>
-              <a:rPr sz="1500">
-                <a:solidFill>
-                  <a:srgbClr val="22282E"/>
-                </a:solidFill>
-              </a:rPr>
-              <a:t>•  ❓ ¿Cómo priorizo si tengo recursos limitados?</a:t>
-            </a:r>
-          </a:p>
-          <a:p>
-            <a:pPr>
-              <a:spcAft>
-                <a:spcPts val="600"/>
-              </a:spcAft>
-            </a:pPr>
-            <a:r>
-              <a:rPr sz="1500">
-                <a:solidFill>
-                  <a:srgbClr val="22282E"/>
-                </a:solidFill>
-              </a:rPr>
-              <a:t>•  Por impacto en tu arquitectura: si el LLM ejecuta acciones (agente), prioriza Excessive Agency e injection; si es solo conversacional, output handling y disclosure.</a:t>
-            </a:r>
-          </a:p>
-          <a:p>
-            <a:pPr>
-              <a:spcAft>
-                <a:spcPts val="600"/>
-              </a:spcAft>
-            </a:pPr>
-            <a:r>
-              <a:rPr sz="1500">
-                <a:solidFill>
-                  <a:srgbClr val="22282E"/>
-                </a:solidFill>
-              </a:rPr>
-              <a:t>•  ❓ ¿Sirve para cumplimiento?</a:t>
+              <a:t>•  Para un chatbot público sin herramientas, prioriza los 3 riesgos más relevantes y justifica.</a:t>
+            </a:r>
+          </a:p>
+          <a:p>
+            <a:pPr>
+              <a:spcAft>
+                <a:spcPts val="600"/>
+              </a:spcAft>
+            </a:pPr>
+            <a:r>
+              <a:rPr sz="1500">
+                <a:solidFill>
+                  <a:srgbClr val="22282E"/>
+                </a:solidFill>
+              </a:rPr>
+              <a:t>•  Da un ejemplo concreto de LLM02 que derive en XSS en un frontend.</a:t>
+            </a:r>
+          </a:p>
+          <a:p>
+            <a:pPr>
+              <a:spcAft>
+                <a:spcPts val="600"/>
+              </a:spcAft>
+            </a:pPr>
+            <a:r>
+              <a:rPr sz="1500">
+                <a:solidFill>
+                  <a:srgbClr val="22282E"/>
+                </a:solidFill>
+              </a:rPr>
+              <a:t>•  Explica la diferencia entre prompt injection directa e indirecta con un caso.</a:t>
+            </a:r>
+          </a:p>
+          <a:p>
+            <a:pPr>
+              <a:spcAft>
+                <a:spcPts val="600"/>
+              </a:spcAft>
+            </a:pPr>
+            <a:r>
+              <a:rPr sz="1500">
+                <a:solidFill>
+                  <a:srgbClr val="22282E"/>
+                </a:solidFill>
+              </a:rPr>
+              <a:t>•  Diseña un control de mínimo privilegio para un agente con acceso a correo.</a:t>
+            </a:r>
+          </a:p>
+          <a:p>
+            <a:pPr>
+              <a:spcAft>
+                <a:spcPts val="600"/>
+              </a:spcAft>
+            </a:pPr>
+            <a:r>
+              <a:rPr sz="1500">
+                <a:solidFill>
+                  <a:srgbClr val="22282E"/>
+                </a:solidFill>
+              </a:rPr>
+              <a:t>•  Propón dos mitigaciones para LLM06 en una arquitectura multi-tenant.</a:t>
+            </a:r>
+          </a:p>
+          <a:p>
+            <a:pPr>
+              <a:spcAft>
+                <a:spcPts val="600"/>
+              </a:spcAft>
+            </a:pPr>
+            <a:r>
+              <a:rPr sz="1500">
+                <a:solidFill>
+                  <a:srgbClr val="22282E"/>
+                </a:solidFill>
+              </a:rPr>
+              <a:t>•  Mapea tres riesgos del Top 10 a técnicas de MITRE ATLAS.</a:t>
             </a:r>
           </a:p>
         </p:txBody>
@@ -3526,7 +3545,7 @@
                   <a:srgbClr val="0B3D2E"/>
                 </a:solidFill>
               </a:rPr>
-              <a:t>🔗 Referencias</a:t>
+              <a:t>📝 Reto verificable</a:t>
             </a:r>
           </a:p>
         </p:txBody>
@@ -3564,6 +3583,438 @@
                   <a:srgbClr val="22282E"/>
                 </a:solidFill>
               </a:rPr>
+              <a:t>•  Entrega una auditoría OWASP-LLM de una aplicación (real o de ejemplo) con un diagrama de arquitectura anotado con fronteras de confianza y una checklist que cubra los 10 riesgos.</a:t>
+            </a:r>
+          </a:p>
+          <a:p>
+            <a:pPr>
+              <a:spcAft>
+                <a:spcPts val="600"/>
+              </a:spcAft>
+            </a:pPr>
+            <a:r>
+              <a:rPr sz="1500">
+                <a:solidFill>
+                  <a:srgbClr val="22282E"/>
+                </a:solidFill>
+              </a:rPr>
+              <a:t>•  Criterio de aceptación: cada uno de los 10 riesgos aparece en la checklist con veredicto (aplica/no aplica) justificado, y para cada riesgo aplicable hay al menos un control concreto y una prioridad.…</a:t>
+            </a:r>
+          </a:p>
+        </p:txBody>
+      </p:sp>
+    </p:spTree>
+  </p:cSld>
+  <p:clrMapOvr>
+    <a:masterClrMapping/>
+  </p:clrMapOvr>
+</p:sld>
+</file>
+
+<file path=ppt/slides/slide13.xml><?xml version="1.0" encoding="utf-8"?>
+<p:sld xmlns:a="http://schemas.openxmlformats.org/drawingml/2006/main" xmlns:p="http://schemas.openxmlformats.org/presentationml/2006/main" xmlns:r="http://schemas.openxmlformats.org/officeDocument/2006/relationships">
+  <p:cSld>
+    <p:spTree>
+      <p:nvGrpSpPr>
+        <p:cNvPr id="1" name=""/>
+        <p:cNvGrpSpPr/>
+        <p:nvPr/>
+      </p:nvGrpSpPr>
+      <p:grpSpPr/>
+      <p:sp>
+        <p:nvSpPr>
+          <p:cNvPr id="2" name="TextBox 1"/>
+          <p:cNvSpPr txBox="1"/>
+          <p:nvPr/>
+        </p:nvSpPr>
+        <p:spPr>
+          <a:xfrm>
+            <a:off x="457200" y="320040"/>
+            <a:ext cx="8229600" cy="822960"/>
+          </a:xfrm>
+          <a:prstGeom prst="rect">
+            <a:avLst/>
+          </a:prstGeom>
+          <a:noFill/>
+        </p:spPr>
+        <p:txBody>
+          <a:bodyPr wrap="square">
+            <a:spAutoFit/>
+          </a:bodyPr>
+          <a:lstStyle/>
+          <a:p>
+            <a:r>
+              <a:rPr sz="2600" b="1">
+                <a:solidFill>
+                  <a:srgbClr val="0B3D2E"/>
+                </a:solidFill>
+              </a:rPr>
+              <a:t>⚠️ Errores comunes</a:t>
+            </a:r>
+          </a:p>
+        </p:txBody>
+      </p:sp>
+      <p:sp>
+        <p:nvSpPr>
+          <p:cNvPr id="3" name="TextBox 2"/>
+          <p:cNvSpPr txBox="1"/>
+          <p:nvPr/>
+        </p:nvSpPr>
+        <p:spPr>
+          <a:xfrm>
+            <a:off x="457200" y="1280160"/>
+            <a:ext cx="8229600" cy="4937760"/>
+          </a:xfrm>
+          <a:prstGeom prst="rect">
+            <a:avLst/>
+          </a:prstGeom>
+          <a:noFill/>
+        </p:spPr>
+        <p:txBody>
+          <a:bodyPr wrap="square">
+            <a:spAutoFit/>
+          </a:bodyPr>
+          <a:lstStyle/>
+          <a:p>
+            <a:pPr>
+              <a:spcAft>
+                <a:spcPts val="600"/>
+              </a:spcAft>
+            </a:pPr>
+            <a:r>
+              <a:rPr sz="1500">
+                <a:solidFill>
+                  <a:srgbClr val="22282E"/>
+                </a:solidFill>
+              </a:rPr>
+              <a:t>•  "Solo me preocupa el prompt injection" — Reduce la superficie a un riesgo. Recorre los 10; output handling y agency son igual de graves.</a:t>
+            </a:r>
+          </a:p>
+          <a:p>
+            <a:pPr>
+              <a:spcAft>
+                <a:spcPts val="600"/>
+              </a:spcAft>
+            </a:pPr>
+            <a:r>
+              <a:rPr sz="1500">
+                <a:solidFill>
+                  <a:srgbClr val="22282E"/>
+                </a:solidFill>
+              </a:rPr>
+              <a:t>•  Confundir LLM01 y LLM02 — Injection es la entrada; output handling es qué haces con la salida. Son controles distintos.</a:t>
+            </a:r>
+          </a:p>
+          <a:p>
+            <a:pPr>
+              <a:spcAft>
+                <a:spcPts val="600"/>
+              </a:spcAft>
+            </a:pPr>
+            <a:r>
+              <a:rPr sz="1500">
+                <a:solidFill>
+                  <a:srgbClr val="22282E"/>
+                </a:solidFill>
+              </a:rPr>
+              <a:t>•  Ignorar la injection indirecta — Solo se filtra la entrada del usuario, no los documentos RAG. Trata todo contenido recuperado como no confiable.</a:t>
+            </a:r>
+          </a:p>
+          <a:p>
+            <a:pPr>
+              <a:spcAft>
+                <a:spcPts val="600"/>
+              </a:spcAft>
+            </a:pPr>
+            <a:r>
+              <a:rPr sz="1500">
+                <a:solidFill>
+                  <a:srgbClr val="22282E"/>
+                </a:solidFill>
+              </a:rPr>
+              <a:t>•  Dar al agente todos los permisos — Excessive Agency. Aplica mínimo privilegio y human-in-the-loop para acciones sensibles.</a:t>
+            </a:r>
+          </a:p>
+          <a:p>
+            <a:pPr>
+              <a:spcAft>
+                <a:spcPts val="600"/>
+              </a:spcAft>
+            </a:pPr>
+            <a:r>
+              <a:rPr sz="1500">
+                <a:solidFill>
+                  <a:srgbClr val="22282E"/>
+                </a:solidFill>
+              </a:rPr>
+              <a:t>•  Usar una versión desactualizada del Top 10 — Los IDs cambian entre 2023 y 2025. Cita la versión y verifica los códigos.</a:t>
+            </a:r>
+          </a:p>
+        </p:txBody>
+      </p:sp>
+    </p:spTree>
+  </p:cSld>
+  <p:clrMapOvr>
+    <a:masterClrMapping/>
+  </p:clrMapOvr>
+</p:sld>
+</file>
+
+<file path=ppt/slides/slide14.xml><?xml version="1.0" encoding="utf-8"?>
+<p:sld xmlns:a="http://schemas.openxmlformats.org/drawingml/2006/main" xmlns:p="http://schemas.openxmlformats.org/presentationml/2006/main" xmlns:r="http://schemas.openxmlformats.org/officeDocument/2006/relationships">
+  <p:cSld>
+    <p:spTree>
+      <p:nvGrpSpPr>
+        <p:cNvPr id="1" name=""/>
+        <p:cNvGrpSpPr/>
+        <p:nvPr/>
+      </p:nvGrpSpPr>
+      <p:grpSpPr/>
+      <p:sp>
+        <p:nvSpPr>
+          <p:cNvPr id="2" name="TextBox 1"/>
+          <p:cNvSpPr txBox="1"/>
+          <p:nvPr/>
+        </p:nvSpPr>
+        <p:spPr>
+          <a:xfrm>
+            <a:off x="457200" y="320040"/>
+            <a:ext cx="8229600" cy="822960"/>
+          </a:xfrm>
+          <a:prstGeom prst="rect">
+            <a:avLst/>
+          </a:prstGeom>
+          <a:noFill/>
+        </p:spPr>
+        <p:txBody>
+          <a:bodyPr wrap="square">
+            <a:spAutoFit/>
+          </a:bodyPr>
+          <a:lstStyle/>
+          <a:p>
+            <a:r>
+              <a:rPr sz="2600" b="1">
+                <a:solidFill>
+                  <a:srgbClr val="0B3D2E"/>
+                </a:solidFill>
+              </a:rPr>
+              <a:t>❓ Preguntas frecuentes</a:t>
+            </a:r>
+          </a:p>
+        </p:txBody>
+      </p:sp>
+      <p:sp>
+        <p:nvSpPr>
+          <p:cNvPr id="3" name="TextBox 2"/>
+          <p:cNvSpPr txBox="1"/>
+          <p:nvPr/>
+        </p:nvSpPr>
+        <p:spPr>
+          <a:xfrm>
+            <a:off x="457200" y="1280160"/>
+            <a:ext cx="8229600" cy="4937760"/>
+          </a:xfrm>
+          <a:prstGeom prst="rect">
+            <a:avLst/>
+          </a:prstGeom>
+          <a:noFill/>
+        </p:spPr>
+        <p:txBody>
+          <a:bodyPr wrap="square">
+            <a:spAutoFit/>
+          </a:bodyPr>
+          <a:lstStyle/>
+          <a:p>
+            <a:pPr>
+              <a:spcAft>
+                <a:spcPts val="600"/>
+              </a:spcAft>
+            </a:pPr>
+            <a:r>
+              <a:rPr sz="1500">
+                <a:solidFill>
+                  <a:srgbClr val="22282E"/>
+                </a:solidFill>
+              </a:rPr>
+              <a:t>•  ❓ ¿El OWASP Top 10 para LLM reemplaza al Top 10 web clásico?</a:t>
+            </a:r>
+          </a:p>
+          <a:p>
+            <a:pPr>
+              <a:spcAft>
+                <a:spcPts val="600"/>
+              </a:spcAft>
+            </a:pPr>
+            <a:r>
+              <a:rPr sz="1500">
+                <a:solidFill>
+                  <a:srgbClr val="22282E"/>
+                </a:solidFill>
+              </a:rPr>
+              <a:t>•  No. Lo complementa. Una app con LLM sigue siendo una app web con sus riesgos habituales; el Top 10 LLM añade los específicos del modelo.</a:t>
+            </a:r>
+          </a:p>
+          <a:p>
+            <a:pPr>
+              <a:spcAft>
+                <a:spcPts val="600"/>
+              </a:spcAft>
+            </a:pPr>
+            <a:r>
+              <a:rPr sz="1500">
+                <a:solidFill>
+                  <a:srgbClr val="22282E"/>
+                </a:solidFill>
+              </a:rPr>
+              <a:t>•  ❓ ¿Cuál es el riesgo más frecuente en la práctica?</a:t>
+            </a:r>
+          </a:p>
+          <a:p>
+            <a:pPr>
+              <a:spcAft>
+                <a:spcPts val="600"/>
+              </a:spcAft>
+            </a:pPr>
+            <a:r>
+              <a:rPr sz="1500">
+                <a:solidFill>
+                  <a:srgbClr val="22282E"/>
+                </a:solidFill>
+              </a:rPr>
+              <a:t>•  Prompt injection (LLM01) y mal manejo de salida (LLM02) dominan los hallazgos reales, sobre todo cuando el LLM alimenta otras acciones o se renderiza sin escape.</a:t>
+            </a:r>
+          </a:p>
+          <a:p>
+            <a:pPr>
+              <a:spcAft>
+                <a:spcPts val="600"/>
+              </a:spcAft>
+            </a:pPr>
+            <a:r>
+              <a:rPr sz="1500">
+                <a:solidFill>
+                  <a:srgbClr val="22282E"/>
+                </a:solidFill>
+              </a:rPr>
+              <a:t>•  ❓ ¿Cómo priorizo si tengo recursos limitados?</a:t>
+            </a:r>
+          </a:p>
+          <a:p>
+            <a:pPr>
+              <a:spcAft>
+                <a:spcPts val="600"/>
+              </a:spcAft>
+            </a:pPr>
+            <a:r>
+              <a:rPr sz="1500">
+                <a:solidFill>
+                  <a:srgbClr val="22282E"/>
+                </a:solidFill>
+              </a:rPr>
+              <a:t>•  Por impacto en tu arquitectura: si el LLM ejecuta acciones (agente), prioriza Excessive Agency e injection; si es solo conversacional, output handling y disclosure.</a:t>
+            </a:r>
+          </a:p>
+          <a:p>
+            <a:pPr>
+              <a:spcAft>
+                <a:spcPts val="600"/>
+              </a:spcAft>
+            </a:pPr>
+            <a:r>
+              <a:rPr sz="1500">
+                <a:solidFill>
+                  <a:srgbClr val="22282E"/>
+                </a:solidFill>
+              </a:rPr>
+              <a:t>•  ❓ ¿Sirve para cumplimiento?</a:t>
+            </a:r>
+          </a:p>
+        </p:txBody>
+      </p:sp>
+    </p:spTree>
+  </p:cSld>
+  <p:clrMapOvr>
+    <a:masterClrMapping/>
+  </p:clrMapOvr>
+</p:sld>
+</file>
+
+<file path=ppt/slides/slide15.xml><?xml version="1.0" encoding="utf-8"?>
+<p:sld xmlns:a="http://schemas.openxmlformats.org/drawingml/2006/main" xmlns:p="http://schemas.openxmlformats.org/presentationml/2006/main" xmlns:r="http://schemas.openxmlformats.org/officeDocument/2006/relationships">
+  <p:cSld>
+    <p:spTree>
+      <p:nvGrpSpPr>
+        <p:cNvPr id="1" name=""/>
+        <p:cNvGrpSpPr/>
+        <p:nvPr/>
+      </p:nvGrpSpPr>
+      <p:grpSpPr/>
+      <p:sp>
+        <p:nvSpPr>
+          <p:cNvPr id="2" name="TextBox 1"/>
+          <p:cNvSpPr txBox="1"/>
+          <p:nvPr/>
+        </p:nvSpPr>
+        <p:spPr>
+          <a:xfrm>
+            <a:off x="457200" y="320040"/>
+            <a:ext cx="8229600" cy="822960"/>
+          </a:xfrm>
+          <a:prstGeom prst="rect">
+            <a:avLst/>
+          </a:prstGeom>
+          <a:noFill/>
+        </p:spPr>
+        <p:txBody>
+          <a:bodyPr wrap="square">
+            <a:spAutoFit/>
+          </a:bodyPr>
+          <a:lstStyle/>
+          <a:p>
+            <a:r>
+              <a:rPr sz="2600" b="1">
+                <a:solidFill>
+                  <a:srgbClr val="0B3D2E"/>
+                </a:solidFill>
+              </a:rPr>
+              <a:t>🔗 Referencias</a:t>
+            </a:r>
+          </a:p>
+        </p:txBody>
+      </p:sp>
+      <p:sp>
+        <p:nvSpPr>
+          <p:cNvPr id="3" name="TextBox 2"/>
+          <p:cNvSpPr txBox="1"/>
+          <p:nvPr/>
+        </p:nvSpPr>
+        <p:spPr>
+          <a:xfrm>
+            <a:off x="457200" y="1280160"/>
+            <a:ext cx="8229600" cy="4937760"/>
+          </a:xfrm>
+          <a:prstGeom prst="rect">
+            <a:avLst/>
+          </a:prstGeom>
+          <a:noFill/>
+        </p:spPr>
+        <p:txBody>
+          <a:bodyPr wrap="square">
+            <a:spAutoFit/>
+          </a:bodyPr>
+          <a:lstStyle/>
+          <a:p>
+            <a:pPr>
+              <a:spcAft>
+                <a:spcPts val="600"/>
+              </a:spcAft>
+            </a:pPr>
+            <a:r>
+              <a:rPr sz="1500">
+                <a:solidFill>
+                  <a:srgbClr val="22282E"/>
+                </a:solidFill>
+              </a:rPr>
               <a:t>•  OWASP Top 10 for LLM Applications — &lt;https://genai.owasp.org/llm-top-10/&gt;</a:t>
             </a:r>
           </a:p>
@@ -3629,6 +4080,81 @@
           </a:p>
         </p:txBody>
       </p:sp>
+    </p:spTree>
+  </p:cSld>
+  <p:clrMapOvr>
+    <a:masterClrMapping/>
+  </p:clrMapOvr>
+</p:sld>
+</file>
+
+<file path=ppt/slides/slide16.xml><?xml version="1.0" encoding="utf-8"?>
+<p:sld xmlns:a="http://schemas.openxmlformats.org/drawingml/2006/main" xmlns:p="http://schemas.openxmlformats.org/presentationml/2006/main" xmlns:r="http://schemas.openxmlformats.org/officeDocument/2006/relationships">
+  <p:cSld>
+    <p:spTree>
+      <p:nvGrpSpPr>
+        <p:cNvPr id="1" name=""/>
+        <p:cNvGrpSpPr/>
+        <p:nvPr/>
+      </p:nvGrpSpPr>
+      <p:grpSpPr/>
+      <p:sp>
+        <p:nvSpPr>
+          <p:cNvPr id="2" name="TextBox 1"/>
+          <p:cNvSpPr txBox="1"/>
+          <p:nvPr/>
+        </p:nvSpPr>
+        <p:spPr>
+          <a:xfrm>
+            <a:off x="457200" y="274320"/>
+            <a:ext cx="8229600" cy="640080"/>
+          </a:xfrm>
+          <a:prstGeom prst="rect">
+            <a:avLst/>
+          </a:prstGeom>
+          <a:noFill/>
+        </p:spPr>
+        <p:txBody>
+          <a:bodyPr wrap="square">
+            <a:spAutoFit/>
+          </a:bodyPr>
+          <a:lstStyle/>
+          <a:p>
+            <a:r>
+              <a:rPr sz="2200" b="1">
+                <a:solidFill>
+                  <a:srgbClr val="0B3D2E"/>
+                </a:solidFill>
+              </a:rPr>
+              <a:t>Diagrama de la clase</a:t>
+            </a:r>
+          </a:p>
+        </p:txBody>
+      </p:sp>
+      <p:pic>
+        <p:nvPicPr>
+          <p:cNvPr id="3" name="Picture 2" descr="7f0a1f3469d4da93.png"/>
+          <p:cNvPicPr>
+            <a:picLocks noChangeAspect="1"/>
+          </p:cNvPicPr>
+          <p:nvPr/>
+        </p:nvPicPr>
+        <p:blipFill>
+          <a:blip r:embed="rId2"/>
+          <a:stretch>
+            <a:fillRect/>
+          </a:stretch>
+        </p:blipFill>
+        <p:spPr>
+          <a:xfrm>
+            <a:off x="457200" y="3307267"/>
+            <a:ext cx="8229600" cy="883546"/>
+          </a:xfrm>
+          <a:prstGeom prst="rect">
+            <a:avLst/>
+          </a:prstGeom>
+        </p:spPr>
+      </p:pic>
     </p:spTree>
   </p:cSld>
   <p:clrMapOvr>
@@ -3713,7 +4239,7 @@
                   <a:srgbClr val="22282E"/>
                 </a:solidFill>
               </a:rPr>
-              <a:t>•  Dominar la taxonomía OWASP Top 10 para aplicaciones con LLM como marco de referencia para auditar y asegurar sistemas basados en modelos de lenguaje. El alumno aprenderá a identificar cada riesgo en una arquitectura real, mapearlo a controles y construir una checklist de auditoría reutilizable.</a:t>
+              <a:t>•  Dominar la taxonomía OWASP Top 10 para aplicaciones con LLM como marco de referencia para auditar y asegurar sistemas basados en modelos de lenguaje. El alumno aprenderá a identificar cada riesgo en…</a:t>
             </a:r>
           </a:p>
         </p:txBody>
@@ -4107,7 +4633,7 @@
                   <a:srgbClr val="0B3D2E"/>
                 </a:solidFill>
               </a:rPr>
-              <a:t>📖 Definiciones y características</a:t>
+              <a:t>🧠 Explicación en profundidad</a:t>
             </a:r>
           </a:p>
         </p:txBody>
@@ -4145,97 +4671,37 @@
                   <a:srgbClr val="22282E"/>
                 </a:solidFill>
               </a:rPr>
-              <a:t>•  LLM01 – Prompt Injection: entradas (directas o indirectas, vía documentos) que reprograman el comportamiento del modelo. Característica: la causa raíz es que datos e instrucciones comparten el mismo canal.</a:t>
-            </a:r>
-          </a:p>
-          <a:p>
-            <a:pPr>
-              <a:spcAft>
-                <a:spcPts val="600"/>
-              </a:spcAft>
-            </a:pPr>
-            <a:r>
-              <a:rPr sz="1500">
-                <a:solidFill>
-                  <a:srgbClr val="22282E"/>
-                </a:solidFill>
-              </a:rPr>
-              <a:t>•  LLM02 – Insecure Output Handling: confiar en la salida del LLM sin validarla antes de renderizarla o ejecutarla. Característica: deriva en XSS, SSRF, path traversal o RCE aguas abajo.</a:t>
-            </a:r>
-          </a:p>
-          <a:p>
-            <a:pPr>
-              <a:spcAft>
-                <a:spcPts val="600"/>
-              </a:spcAft>
-            </a:pPr>
-            <a:r>
-              <a:rPr sz="1500">
-                <a:solidFill>
-                  <a:srgbClr val="22282E"/>
-                </a:solidFill>
-              </a:rPr>
-              <a:t>•  LLM04 – Model Denial of Service: entradas que fuerzan consumo excesivo (contextos enormes, bucles). Característica: impacta coste y disponibilidad.</a:t>
-            </a:r>
-          </a:p>
-          <a:p>
-            <a:pPr>
-              <a:spcAft>
-                <a:spcPts val="600"/>
-              </a:spcAft>
-            </a:pPr>
-            <a:r>
-              <a:rPr sz="1500">
-                <a:solidFill>
-                  <a:srgbClr val="22282E"/>
-                </a:solidFill>
-              </a:rPr>
-              <a:t>•  LLM06 – Sensitive Information Disclosure: el modelo revela secretos del prompt del sistema, datos de otros usuarios o del entrenamiento. Característica: agravado por memorización.</a:t>
-            </a:r>
-          </a:p>
-          <a:p>
-            <a:pPr>
-              <a:spcAft>
-                <a:spcPts val="600"/>
-              </a:spcAft>
-            </a:pPr>
-            <a:r>
-              <a:rPr sz="1500">
-                <a:solidFill>
-                  <a:srgbClr val="22282E"/>
-                </a:solidFill>
-              </a:rPr>
-              <a:t>•  LLM08 – Excessive Agency: el sistema concede al LLM demasiada capacidad de acción (permisos, herramientas, autonomía). Característica: un prompt malicioso se convierte en acciones reales.</a:t>
-            </a:r>
-          </a:p>
-          <a:p>
-            <a:pPr>
-              <a:spcAft>
-                <a:spcPts val="600"/>
-              </a:spcAft>
-            </a:pPr>
-            <a:r>
-              <a:rPr sz="1500">
-                <a:solidFill>
-                  <a:srgbClr val="22282E"/>
-                </a:solidFill>
-              </a:rPr>
-              <a:t>•  LLM09 – Overreliance: usuarios o sistemas confían en salidas sin verificar (alucinaciones). Característica: riesgo operacional y legal.</a:t>
-            </a:r>
-          </a:p>
-          <a:p>
-            <a:pPr>
-              <a:spcAft>
-                <a:spcPts val="600"/>
-              </a:spcAft>
-            </a:pPr>
-            <a:r>
-              <a:rPr sz="1500">
-                <a:solidFill>
-                  <a:srgbClr val="22282E"/>
-                </a:solidFill>
-              </a:rPr>
-              <a:t>•  LLM10 – Model Theft: exfiltración del modelo propietario (ver clase 294).</a:t>
+              <a:t>•  OWASP Top 10 para LLM organiza riesgos de aplicaciones; no certifica modelos ni sustituye threat modeling. Cada categoría debe mapearse a activos, fronteras, pruebas y evidencia del sistema concreto.</a:t>
+            </a:r>
+          </a:p>
+          <a:p>
+            <a:pPr>
+              <a:spcAft>
+                <a:spcPts val="600"/>
+              </a:spcAft>
+            </a:pPr>
+            <a:r>
+              <a:rPr sz="1500">
+                <a:solidFill>
+                  <a:srgbClr val="22282E"/>
+                </a:solidFill>
+              </a:rPr>
+              <a:t>•  El diagrama debe leerse como una cadena de supuestos: verificar un nodo no demuestra los siguientes. La evaluación declara actor, acceso, datos, métrica, umbral y consecuencia; compara una línea base…</a:t>
+            </a:r>
+          </a:p>
+          <a:p>
+            <a:pPr>
+              <a:spcAft>
+                <a:spcPts val="600"/>
+              </a:spcAft>
+            </a:pPr>
+            <a:r>
+              <a:rPr sz="1500">
+                <a:solidFill>
+                  <a:srgbClr val="22282E"/>
+                </a:solidFill>
+              </a:rPr>
+              <a:t>•  El equipo marca diez categorías como completas, pero un agente tiene herramienta de borrado sin aprobación. El escenario revela la brecha que el checklist ocultó.</a:t>
             </a:r>
           </a:p>
         </p:txBody>
@@ -4286,7 +4752,7 @@
                   <a:srgbClr val="0B3D2E"/>
                 </a:solidFill>
               </a:rPr>
-              <a:t>🧰 Herramientas y preparación</a:t>
+              <a:t>📔 Glosario operativo</a:t>
             </a:r>
           </a:p>
         </p:txBody>
@@ -4324,52 +4790,52 @@
                   <a:srgbClr val="22282E"/>
                 </a:solidFill>
               </a:rPr>
-              <a:t>•  Documento oficial OWASP Top 10 for LLM Applications (última versión) y sus fichas por riesgo.</a:t>
-            </a:r>
-          </a:p>
-          <a:p>
-            <a:pPr>
-              <a:spcAft>
-                <a:spcPts val="600"/>
-              </a:spcAft>
-            </a:pPr>
-            <a:r>
-              <a:rPr sz="1500">
-                <a:solidFill>
-                  <a:srgbClr val="22282E"/>
-                </a:solidFill>
-              </a:rPr>
-              <a:t>•  Una app con LLM de ejemplo para auditar (chatbot de soporte con RAG, o un agente con herramientas).</a:t>
-            </a:r>
-          </a:p>
-          <a:p>
-            <a:pPr>
-              <a:spcAft>
-                <a:spcPts val="600"/>
-              </a:spcAft>
-            </a:pPr>
-            <a:r>
-              <a:rPr sz="1500">
-                <a:solidFill>
-                  <a:srgbClr val="22282E"/>
-                </a:solidFill>
-              </a:rPr>
-              <a:t>•  garak y PyRIT (clases 296–297) para pruebas prácticas de algunos riesgos.</a:t>
-            </a:r>
-          </a:p>
-          <a:p>
-            <a:pPr>
-              <a:spcAft>
-                <a:spcPts val="600"/>
-              </a:spcAft>
-            </a:pPr>
-            <a:r>
-              <a:rPr sz="1500">
-                <a:solidFill>
-                  <a:srgbClr val="22282E"/>
-                </a:solidFill>
-              </a:rPr>
-              <a:t>•  Plantilla de checklist en hoja de cálculo o Markdown.</a:t>
+              <a:t>•  Término — Definición</a:t>
+            </a:r>
+          </a:p>
+          <a:p>
+            <a:pPr>
+              <a:spcAft>
+                <a:spcPts val="600"/>
+              </a:spcAft>
+            </a:pPr>
+            <a:r>
+              <a:rPr sz="1500">
+                <a:solidFill>
+                  <a:srgbClr val="22282E"/>
+                </a:solidFill>
+              </a:rPr>
+              <a:t>•  Taxonomía — Lenguaje común de riesgos, no veredicto.</a:t>
+            </a:r>
+          </a:p>
+          <a:p>
+            <a:pPr>
+              <a:spcAft>
+                <a:spcPts val="600"/>
+              </a:spcAft>
+            </a:pPr>
+            <a:r>
+              <a:rPr sz="1500">
+                <a:solidFill>
+                  <a:srgbClr val="22282E"/>
+                </a:solidFill>
+              </a:rPr>
+              <a:t>•  Evaluación — Experimento reproducible ligado a un riesgo y criterio.</a:t>
+            </a:r>
+          </a:p>
+          <a:p>
+            <a:pPr>
+              <a:spcAft>
+                <a:spcPts val="600"/>
+              </a:spcAft>
+            </a:pPr>
+            <a:r>
+              <a:rPr sz="1500">
+                <a:solidFill>
+                  <a:srgbClr val="22282E"/>
+                </a:solidFill>
+              </a:rPr>
+              <a:t>•  Riesgo residual — Exposición que permanece tras controles.</a:t>
             </a:r>
           </a:p>
         </p:txBody>
@@ -4420,7 +4886,7 @@
                   <a:srgbClr val="0B3D2E"/>
                 </a:solidFill>
               </a:rPr>
-              <a:t>🧪 Laboratorio guiado (auditoría aplicada)</a:t>
+              <a:t>✅ Criterio de dominio</a:t>
             </a:r>
           </a:p>
         </p:txBody>
@@ -4458,97 +4924,7 @@
                   <a:srgbClr val="22282E"/>
                 </a:solidFill>
               </a:rPr>
-              <a:t>•  Ejercicio de análisis de arquitectura, no de explotación.</a:t>
-            </a:r>
-          </a:p>
-          <a:p>
-            <a:pPr>
-              <a:spcAft>
-                <a:spcPts val="600"/>
-              </a:spcAft>
-            </a:pPr>
-            <a:r>
-              <a:rPr sz="1500">
-                <a:solidFill>
-                  <a:srgbClr val="22282E"/>
-                </a:solidFill>
-              </a:rPr>
-              <a:t>•  Elige una app real de referencia. Ejemplo: "asistente de soporte que consulta una base de conocimiento (RAG) y puede crear tickets vía API".</a:t>
-            </a:r>
-          </a:p>
-          <a:p>
-            <a:pPr>
-              <a:spcAft>
-                <a:spcPts val="600"/>
-              </a:spcAft>
-            </a:pPr>
-            <a:r>
-              <a:rPr sz="1500">
-                <a:solidFill>
-                  <a:srgbClr val="22282E"/>
-                </a:solidFill>
-              </a:rPr>
-              <a:t>•  Dibuja el flujo de datos. Usuario → prompt → recuperación de documentos → LLM → salida → acciones (crear ticket). Marca cada frontera de confianza.</a:t>
-            </a:r>
-          </a:p>
-          <a:p>
-            <a:pPr>
-              <a:spcAft>
-                <a:spcPts val="600"/>
-              </a:spcAft>
-            </a:pPr>
-            <a:r>
-              <a:rPr sz="1500">
-                <a:solidFill>
-                  <a:srgbClr val="22282E"/>
-                </a:solidFill>
-              </a:rPr>
-              <a:t>•  Recorre el Top 10 riesgo por riesgo. Para cada uno, responde: ¿aplica a esta app? ¿dónde exactamente? ¿con qué impacto?</a:t>
-            </a:r>
-          </a:p>
-          <a:p>
-            <a:pPr>
-              <a:spcAft>
-                <a:spcPts val="600"/>
-              </a:spcAft>
-            </a:pPr>
-            <a:r>
-              <a:rPr sz="1500">
-                <a:solidFill>
-                  <a:srgbClr val="22282E"/>
-                </a:solidFill>
-              </a:rPr>
-              <a:t>•  Prompt injection (LLM01). Identifica dónde entra texto no confiable (mensaje del usuario y documentos recuperados). Marca ambos como fuentes de injection directa e indirecta.</a:t>
-            </a:r>
-          </a:p>
-          <a:p>
-            <a:pPr>
-              <a:spcAft>
-                <a:spcPts val="600"/>
-              </a:spcAft>
-            </a:pPr>
-            <a:r>
-              <a:rPr sz="1500">
-                <a:solidFill>
-                  <a:srgbClr val="22282E"/>
-                </a:solidFill>
-              </a:rPr>
-              <a:t>•  Output handling (LLM02). ¿La respuesta se renderiza en HTML? ¿Se pasa a otra herramienta? Define validación/escape necesarios.</a:t>
-            </a:r>
-          </a:p>
-          <a:p>
-            <a:pPr>
-              <a:spcAft>
-                <a:spcPts val="600"/>
-              </a:spcAft>
-            </a:pPr>
-            <a:r>
-              <a:rPr sz="1500">
-                <a:solidFill>
-                  <a:srgbClr val="22282E"/>
-                </a:solidFill>
-              </a:rPr>
-              <a:t>•  Excessive Agency (LLM08). Lista las herramientas del agente y sus permisos. Aplica mínimo privilegio: ¿crear ticket necesita aprobación humana?</a:t>
+              <a:t>•  El alumno demuestra dominio cuando formula un escenario específico, reproduce evidencia, explica límites y diseña controles técnicos y de gobierno sin atribuir certeza al modelo.</a:t>
             </a:r>
           </a:p>
         </p:txBody>
@@ -4599,7 +4975,7 @@
                   <a:srgbClr val="0B3D2E"/>
                 </a:solidFill>
               </a:rPr>
-              <a:t>✍️ Ejercicios</a:t>
+              <a:t>📖 Definiciones y características</a:t>
             </a:r>
           </a:p>
         </p:txBody>
@@ -4637,82 +5013,97 @@
                   <a:srgbClr val="22282E"/>
                 </a:solidFill>
               </a:rPr>
-              <a:t>•  Para un chatbot público sin herramientas, prioriza los 3 riesgos más relevantes y justifica.</a:t>
-            </a:r>
-          </a:p>
-          <a:p>
-            <a:pPr>
-              <a:spcAft>
-                <a:spcPts val="600"/>
-              </a:spcAft>
-            </a:pPr>
-            <a:r>
-              <a:rPr sz="1500">
-                <a:solidFill>
-                  <a:srgbClr val="22282E"/>
-                </a:solidFill>
-              </a:rPr>
-              <a:t>•  Da un ejemplo concreto de LLM02 que derive en XSS en un frontend.</a:t>
-            </a:r>
-          </a:p>
-          <a:p>
-            <a:pPr>
-              <a:spcAft>
-                <a:spcPts val="600"/>
-              </a:spcAft>
-            </a:pPr>
-            <a:r>
-              <a:rPr sz="1500">
-                <a:solidFill>
-                  <a:srgbClr val="22282E"/>
-                </a:solidFill>
-              </a:rPr>
-              <a:t>•  Explica la diferencia entre prompt injection directa e indirecta con un caso.</a:t>
-            </a:r>
-          </a:p>
-          <a:p>
-            <a:pPr>
-              <a:spcAft>
-                <a:spcPts val="600"/>
-              </a:spcAft>
-            </a:pPr>
-            <a:r>
-              <a:rPr sz="1500">
-                <a:solidFill>
-                  <a:srgbClr val="22282E"/>
-                </a:solidFill>
-              </a:rPr>
-              <a:t>•  Diseña un control de mínimo privilegio para un agente con acceso a correo.</a:t>
-            </a:r>
-          </a:p>
-          <a:p>
-            <a:pPr>
-              <a:spcAft>
-                <a:spcPts val="600"/>
-              </a:spcAft>
-            </a:pPr>
-            <a:r>
-              <a:rPr sz="1500">
-                <a:solidFill>
-                  <a:srgbClr val="22282E"/>
-                </a:solidFill>
-              </a:rPr>
-              <a:t>•  Propón dos mitigaciones para LLM06 en una arquitectura multi-tenant.</a:t>
-            </a:r>
-          </a:p>
-          <a:p>
-            <a:pPr>
-              <a:spcAft>
-                <a:spcPts val="600"/>
-              </a:spcAft>
-            </a:pPr>
-            <a:r>
-              <a:rPr sz="1500">
-                <a:solidFill>
-                  <a:srgbClr val="22282E"/>
-                </a:solidFill>
-              </a:rPr>
-              <a:t>•  Mapea tres riesgos del Top 10 a técnicas de MITRE ATLAS.</a:t>
+              <a:t>•  LLM01 – Prompt Injection: entradas (directas o indirectas, vía documentos) que reprograman el comportamiento del modelo. Característica: la causa raíz es que datos e instrucciones comparten el mismo…</a:t>
+            </a:r>
+          </a:p>
+          <a:p>
+            <a:pPr>
+              <a:spcAft>
+                <a:spcPts val="600"/>
+              </a:spcAft>
+            </a:pPr>
+            <a:r>
+              <a:rPr sz="1500">
+                <a:solidFill>
+                  <a:srgbClr val="22282E"/>
+                </a:solidFill>
+              </a:rPr>
+              <a:t>•  LLM02 – Insecure Output Handling: confiar en la salida del LLM sin validarla antes de renderizarla o ejecutarla. Característica: deriva en XSS, SSRF, path traversal o RCE aguas abajo.</a:t>
+            </a:r>
+          </a:p>
+          <a:p>
+            <a:pPr>
+              <a:spcAft>
+                <a:spcPts val="600"/>
+              </a:spcAft>
+            </a:pPr>
+            <a:r>
+              <a:rPr sz="1500">
+                <a:solidFill>
+                  <a:srgbClr val="22282E"/>
+                </a:solidFill>
+              </a:rPr>
+              <a:t>•  LLM04 – Model Denial of Service: entradas que fuerzan consumo excesivo (contextos enormes, bucles). Característica: impacta coste y disponibilidad.</a:t>
+            </a:r>
+          </a:p>
+          <a:p>
+            <a:pPr>
+              <a:spcAft>
+                <a:spcPts val="600"/>
+              </a:spcAft>
+            </a:pPr>
+            <a:r>
+              <a:rPr sz="1500">
+                <a:solidFill>
+                  <a:srgbClr val="22282E"/>
+                </a:solidFill>
+              </a:rPr>
+              <a:t>•  LLM06 – Sensitive Information Disclosure: el modelo revela secretos del prompt del sistema, datos de otros usuarios o del entrenamiento. Característica: agravado por memorización.</a:t>
+            </a:r>
+          </a:p>
+          <a:p>
+            <a:pPr>
+              <a:spcAft>
+                <a:spcPts val="600"/>
+              </a:spcAft>
+            </a:pPr>
+            <a:r>
+              <a:rPr sz="1500">
+                <a:solidFill>
+                  <a:srgbClr val="22282E"/>
+                </a:solidFill>
+              </a:rPr>
+              <a:t>•  LLM08 – Excessive Agency: el sistema concede al LLM demasiada capacidad de acción (permisos, herramientas, autonomía). Característica: un prompt malicioso se convierte en acciones reales.</a:t>
+            </a:r>
+          </a:p>
+          <a:p>
+            <a:pPr>
+              <a:spcAft>
+                <a:spcPts val="600"/>
+              </a:spcAft>
+            </a:pPr>
+            <a:r>
+              <a:rPr sz="1500">
+                <a:solidFill>
+                  <a:srgbClr val="22282E"/>
+                </a:solidFill>
+              </a:rPr>
+              <a:t>•  LLM09 – Overreliance: usuarios o sistemas confían en salidas sin verificar (alucinaciones). Característica: riesgo operacional y legal.</a:t>
+            </a:r>
+          </a:p>
+          <a:p>
+            <a:pPr>
+              <a:spcAft>
+                <a:spcPts val="600"/>
+              </a:spcAft>
+            </a:pPr>
+            <a:r>
+              <a:rPr sz="1500">
+                <a:solidFill>
+                  <a:srgbClr val="22282E"/>
+                </a:solidFill>
+              </a:rPr>
+              <a:t>•  LLM10 – Model Theft: exfiltración del modelo propietario (ver clase 294).</a:t>
             </a:r>
           </a:p>
         </p:txBody>
@@ -4763,7 +5154,7 @@
                   <a:srgbClr val="0B3D2E"/>
                 </a:solidFill>
               </a:rPr>
-              <a:t>📝 Reto verificable</a:t>
+              <a:t>🧰 Herramientas y preparación</a:t>
             </a:r>
           </a:p>
         </p:txBody>
@@ -4801,22 +5192,52 @@
                   <a:srgbClr val="22282E"/>
                 </a:solidFill>
               </a:rPr>
-              <a:t>•  Entrega una auditoría OWASP-LLM de una aplicación (real o de ejemplo) con un diagrama de arquitectura anotado con fronteras de confianza y una checklist que cubra los 10 riesgos.</a:t>
-            </a:r>
-          </a:p>
-          <a:p>
-            <a:pPr>
-              <a:spcAft>
-                <a:spcPts val="600"/>
-              </a:spcAft>
-            </a:pPr>
-            <a:r>
-              <a:rPr sz="1500">
-                <a:solidFill>
-                  <a:srgbClr val="22282E"/>
-                </a:solidFill>
-              </a:rPr>
-              <a:t>•  Criterio de aceptación: cada uno de los 10 riesgos aparece en la checklist con veredicto (aplica/no aplica) justificado, y para cada riesgo aplicable hay al menos un control concreto y una prioridad. Un tercero debe poder usar tu checklist para auditar otra app similar.</a:t>
+              <a:t>•  Documento oficial OWASP Top 10 for LLM Applications (última versión) y sus fichas por riesgo.</a:t>
+            </a:r>
+          </a:p>
+          <a:p>
+            <a:pPr>
+              <a:spcAft>
+                <a:spcPts val="600"/>
+              </a:spcAft>
+            </a:pPr>
+            <a:r>
+              <a:rPr sz="1500">
+                <a:solidFill>
+                  <a:srgbClr val="22282E"/>
+                </a:solidFill>
+              </a:rPr>
+              <a:t>•  Una app con LLM de ejemplo para auditar (chatbot de soporte con RAG, o un agente con herramientas).</a:t>
+            </a:r>
+          </a:p>
+          <a:p>
+            <a:pPr>
+              <a:spcAft>
+                <a:spcPts val="600"/>
+              </a:spcAft>
+            </a:pPr>
+            <a:r>
+              <a:rPr sz="1500">
+                <a:solidFill>
+                  <a:srgbClr val="22282E"/>
+                </a:solidFill>
+              </a:rPr>
+              <a:t>•  garak y PyRIT (clases 296–297) para pruebas prácticas de algunos riesgos.</a:t>
+            </a:r>
+          </a:p>
+          <a:p>
+            <a:pPr>
+              <a:spcAft>
+                <a:spcPts val="600"/>
+              </a:spcAft>
+            </a:pPr>
+            <a:r>
+              <a:rPr sz="1500">
+                <a:solidFill>
+                  <a:srgbClr val="22282E"/>
+                </a:solidFill>
+              </a:rPr>
+              <a:t>•  Plantilla de checklist en hoja de cálculo o Markdown.</a:t>
             </a:r>
           </a:p>
         </p:txBody>
